--- a/HW1/Report1.pptx
+++ b/HW1/Report1.pptx
@@ -318,6 +318,11 @@
       </a:defRPr>
     </a:lvl9pPr>
   </p:defaultTextStyle>
+  <p:extLst>
+    <p:ext uri="{EFAFB233-063F-42B5-8137-9DF3F51BA10A}">
+      <p15:sldGuideLst xmlns:p15="http://schemas.microsoft.com/office/powerpoint/2012/main"/>
+    </p:ext>
+  </p:extLst>
 </p:presentation>
 </file>
 
@@ -609,6 +614,10 @@
           </p:nvPr>
         </p:nvSpPr>
         <p:spPr>
+          <a:xfrm>
+            <a:off x="381000" y="685800"/>
+            <a:ext cx="6096000" cy="3429000"/>
+          </a:xfrm>
           <a:prstGeom prst="rect">
             <a:avLst/>
           </a:prstGeom>
@@ -3578,7 +3587,7 @@
           </a:ln>
           <a:extLst>
             <a:ext uri="{C572A759-6A51-4108-AA02-DFA0A04FC94B}">
-              <ma14:wrappingTextBoxFlag xmlns:ma14="http://schemas.microsoft.com/office/mac/drawingml/2011/main" xmlns:a14="http://schemas.microsoft.com/office/drawing/2010/main" xmlns:m="http://schemas.openxmlformats.org/officeDocument/2006/math" xmlns="" val="1"/>
+              <ma14:wrappingTextBoxFlag xmlns="" xmlns:m="http://schemas.openxmlformats.org/officeDocument/2006/math" xmlns:a14="http://schemas.microsoft.com/office/drawing/2010/main" xmlns:ma14="http://schemas.microsoft.com/office/mac/drawingml/2011/main" val="1"/>
             </a:ext>
           </a:extLst>
         </p:spPr>
@@ -3617,7 +3626,7 @@
           </a:ln>
           <a:extLst>
             <a:ext uri="{C572A759-6A51-4108-AA02-DFA0A04FC94B}">
-              <ma14:wrappingTextBoxFlag xmlns:ma14="http://schemas.microsoft.com/office/mac/drawingml/2011/main" xmlns:a14="http://schemas.microsoft.com/office/drawing/2010/main" xmlns:m="http://schemas.openxmlformats.org/officeDocument/2006/math" xmlns="" val="1"/>
+              <ma14:wrappingTextBoxFlag xmlns="" xmlns:m="http://schemas.openxmlformats.org/officeDocument/2006/math" xmlns:a14="http://schemas.microsoft.com/office/drawing/2010/main" xmlns:ma14="http://schemas.microsoft.com/office/mac/drawingml/2011/main" val="1"/>
             </a:ext>
           </a:extLst>
         </p:spPr>
@@ -4463,7 +4472,7 @@
           </a:prstGeom>
           <a:extLst>
             <a:ext uri="{C572A759-6A51-4108-AA02-DFA0A04FC94B}">
-              <ma14:wrappingTextBoxFlag xmlns:ma14="http://schemas.microsoft.com/office/mac/drawingml/2011/main" xmlns:a14="http://schemas.microsoft.com/office/drawing/2010/main" xmlns:m="http://schemas.openxmlformats.org/officeDocument/2006/math" xmlns="" val="1"/>
+              <ma14:wrappingTextBoxFlag xmlns="" xmlns:m="http://schemas.openxmlformats.org/officeDocument/2006/math" xmlns:a14="http://schemas.microsoft.com/office/drawing/2010/main" xmlns:ma14="http://schemas.microsoft.com/office/mac/drawingml/2011/main" val="1"/>
             </a:ext>
           </a:extLst>
         </p:spPr>
@@ -4478,7 +4487,8 @@
           </a:lstStyle>
           <a:p>
             <a:r>
-              <a:t>20206.03.16</a:t>
+              <a:rPr dirty="0"/>
+              <a:t>2026.03.16</a:t>
             </a:r>
           </a:p>
         </p:txBody>
@@ -4618,6 +4628,172 @@
       </p:grpSpPr>
       <p:sp>
         <p:nvSpPr>
+          <p:cNvPr id="4" name="矩形: 圓角 3">
+            <a:extLst>
+              <a:ext uri="{FF2B5EF4-FFF2-40B4-BE49-F238E27FC236}">
+                <a16:creationId xmlns:a16="http://schemas.microsoft.com/office/drawing/2014/main" id="{91E15E58-EC0F-4458-790C-B1B102F3AC67}"/>
+              </a:ext>
+            </a:extLst>
+          </p:cNvPr>
+          <p:cNvSpPr/>
+          <p:nvPr/>
+        </p:nvSpPr>
+        <p:spPr>
+          <a:xfrm>
+            <a:off x="16680714" y="8937751"/>
+            <a:ext cx="6316446" cy="1433163"/>
+          </a:xfrm>
+          <a:prstGeom prst="roundRect">
+            <a:avLst/>
+          </a:prstGeom>
+          <a:solidFill>
+            <a:schemeClr val="bg2">
+              <a:lumMod val="90000"/>
+            </a:schemeClr>
+          </a:solidFill>
+          <a:ln w="12700" cap="flat">
+            <a:noFill/>
+            <a:miter lim="400000"/>
+          </a:ln>
+          <a:effectLst/>
+          <a:sp3d/>
+        </p:spPr>
+        <p:style>
+          <a:lnRef idx="0">
+            <a:scrgbClr r="0" g="0" b="0"/>
+          </a:lnRef>
+          <a:fillRef idx="0">
+            <a:scrgbClr r="0" g="0" b="0"/>
+          </a:fillRef>
+          <a:effectRef idx="0">
+            <a:scrgbClr r="0" g="0" b="0"/>
+          </a:effectRef>
+          <a:fontRef idx="none"/>
+        </p:style>
+        <p:txBody>
+          <a:bodyPr rot="0" spcFirstLastPara="1" vertOverflow="overflow" horzOverflow="overflow" vert="horz" wrap="square" lIns="50800" tIns="50800" rIns="50800" bIns="50800" numCol="1" spcCol="38100" rtlCol="0" anchor="ctr">
+            <a:spAutoFit/>
+          </a:bodyPr>
+          <a:lstStyle/>
+          <a:p>
+            <a:pPr marL="0" marR="0" indent="0" algn="ctr" defTabSz="825500" rtl="0" fontAlgn="auto" latinLnBrk="0" hangingPunct="0">
+              <a:lnSpc>
+                <a:spcPct val="100000"/>
+              </a:lnSpc>
+              <a:spcBef>
+                <a:spcPts val="0"/>
+              </a:spcBef>
+              <a:spcAft>
+                <a:spcPts val="0"/>
+              </a:spcAft>
+              <a:buClrTx/>
+              <a:buSzTx/>
+              <a:buFontTx/>
+              <a:buNone/>
+              <a:tabLst/>
+            </a:pPr>
+            <a:endParaRPr kumimoji="0" lang="zh-TW" altLang="en-US" sz="3200" b="0" i="0" u="none" strike="noStrike" cap="none" spc="0" normalizeH="0" baseline="0">
+              <a:ln>
+                <a:noFill/>
+              </a:ln>
+              <a:solidFill>
+                <a:srgbClr val="FFFFFF"/>
+              </a:solidFill>
+              <a:effectLst/>
+              <a:uFillTx/>
+              <a:latin typeface="Helvetica Neue Medium"/>
+              <a:ea typeface="Helvetica Neue Medium"/>
+              <a:cs typeface="Helvetica Neue Medium"/>
+              <a:sym typeface="Helvetica Neue Medium"/>
+            </a:endParaRPr>
+          </a:p>
+        </p:txBody>
+      </p:sp>
+      <p:sp>
+        <p:nvSpPr>
+          <p:cNvPr id="2" name="矩形: 圓角 1">
+            <a:extLst>
+              <a:ext uri="{FF2B5EF4-FFF2-40B4-BE49-F238E27FC236}">
+                <a16:creationId xmlns:a16="http://schemas.microsoft.com/office/drawing/2014/main" id="{011C6AD1-1C1C-8254-61F7-94323B273A61}"/>
+              </a:ext>
+            </a:extLst>
+          </p:cNvPr>
+          <p:cNvSpPr/>
+          <p:nvPr/>
+        </p:nvSpPr>
+        <p:spPr>
+          <a:xfrm>
+            <a:off x="1527029" y="4053840"/>
+            <a:ext cx="4693920" cy="1433163"/>
+          </a:xfrm>
+          <a:prstGeom prst="roundRect">
+            <a:avLst/>
+          </a:prstGeom>
+          <a:solidFill>
+            <a:schemeClr val="bg2">
+              <a:lumMod val="90000"/>
+            </a:schemeClr>
+          </a:solidFill>
+          <a:ln w="12700" cap="flat">
+            <a:noFill/>
+            <a:miter lim="400000"/>
+          </a:ln>
+          <a:effectLst/>
+          <a:sp3d/>
+        </p:spPr>
+        <p:style>
+          <a:lnRef idx="0">
+            <a:scrgbClr r="0" g="0" b="0"/>
+          </a:lnRef>
+          <a:fillRef idx="0">
+            <a:scrgbClr r="0" g="0" b="0"/>
+          </a:fillRef>
+          <a:effectRef idx="0">
+            <a:scrgbClr r="0" g="0" b="0"/>
+          </a:effectRef>
+          <a:fontRef idx="none"/>
+        </p:style>
+        <p:txBody>
+          <a:bodyPr rot="0" spcFirstLastPara="1" vertOverflow="overflow" horzOverflow="overflow" vert="horz" wrap="square" lIns="50800" tIns="50800" rIns="50800" bIns="50800" numCol="1" spcCol="38100" rtlCol="0" anchor="ctr">
+            <a:spAutoFit/>
+          </a:bodyPr>
+          <a:lstStyle/>
+          <a:p>
+            <a:pPr marL="0" marR="0" indent="0" algn="ctr" defTabSz="825500" rtl="0" fontAlgn="auto" latinLnBrk="0" hangingPunct="0">
+              <a:lnSpc>
+                <a:spcPct val="100000"/>
+              </a:lnSpc>
+              <a:spcBef>
+                <a:spcPts val="0"/>
+              </a:spcBef>
+              <a:spcAft>
+                <a:spcPts val="0"/>
+              </a:spcAft>
+              <a:buClrTx/>
+              <a:buSzTx/>
+              <a:buFontTx/>
+              <a:buNone/>
+              <a:tabLst/>
+            </a:pPr>
+            <a:endParaRPr kumimoji="0" lang="zh-TW" altLang="en-US" sz="3200" b="0" i="0" u="none" strike="noStrike" cap="none" spc="0" normalizeH="0" baseline="0">
+              <a:ln>
+                <a:noFill/>
+              </a:ln>
+              <a:solidFill>
+                <a:srgbClr val="FFFFFF"/>
+              </a:solidFill>
+              <a:effectLst/>
+              <a:uFillTx/>
+              <a:latin typeface="Helvetica Neue Medium"/>
+              <a:ea typeface="Helvetica Neue Medium"/>
+              <a:cs typeface="Helvetica Neue Medium"/>
+              <a:sym typeface="Helvetica Neue Medium"/>
+            </a:endParaRPr>
+          </a:p>
+        </p:txBody>
+      </p:sp>
+      <p:sp>
+        <p:nvSpPr>
           <p:cNvPr id="175" name="Table of Content"/>
           <p:cNvSpPr txBox="1">
             <a:spLocks noGrp="1"/>
@@ -4653,18 +4829,18 @@
         </p:nvSpPr>
         <p:spPr>
           <a:xfrm>
-            <a:off x="1206500" y="4248504"/>
-            <a:ext cx="5334977" cy="8256012"/>
+            <a:off x="1206500" y="4319113"/>
+            <a:ext cx="5334977" cy="902616"/>
           </a:xfrm>
           <a:prstGeom prst="rect">
             <a:avLst/>
           </a:prstGeom>
         </p:spPr>
         <p:txBody>
-          <a:bodyPr/>
+          <a:bodyPr anchor="ctr"/>
           <a:lstStyle/>
           <a:p>
-            <a:pPr marL="0" indent="0">
+            <a:pPr marL="0" indent="0" algn="ctr">
               <a:buNone/>
             </a:pPr>
             <a:r>
@@ -4672,11 +4848,88 @@
               <a:t>Software</a:t>
             </a:r>
           </a:p>
-          <a:p>
-            <a:pPr marL="0" indent="0">
+        </p:txBody>
+      </p:sp>
+      <p:sp>
+        <p:nvSpPr>
+          <p:cNvPr id="3" name="矩形: 圓角 2">
+            <a:extLst>
+              <a:ext uri="{FF2B5EF4-FFF2-40B4-BE49-F238E27FC236}">
+                <a16:creationId xmlns:a16="http://schemas.microsoft.com/office/drawing/2014/main" id="{CDFAE61A-AF82-35EB-6B23-8E7FA36632CD}"/>
+              </a:ext>
+            </a:extLst>
+          </p:cNvPr>
+          <p:cNvSpPr/>
+          <p:nvPr/>
+        </p:nvSpPr>
+        <p:spPr>
+          <a:xfrm>
+            <a:off x="8499962" y="6415739"/>
+            <a:ext cx="5720862" cy="1433163"/>
+          </a:xfrm>
+          <a:prstGeom prst="roundRect">
+            <a:avLst/>
+          </a:prstGeom>
+          <a:solidFill>
+            <a:schemeClr val="bg2">
+              <a:lumMod val="90000"/>
+            </a:schemeClr>
+          </a:solidFill>
+          <a:ln w="12700" cap="flat">
+            <a:noFill/>
+            <a:miter lim="400000"/>
+          </a:ln>
+          <a:effectLst/>
+          <a:sp3d/>
+        </p:spPr>
+        <p:style>
+          <a:lnRef idx="0">
+            <a:scrgbClr r="0" g="0" b="0"/>
+          </a:lnRef>
+          <a:fillRef idx="0">
+            <a:scrgbClr r="0" g="0" b="0"/>
+          </a:fillRef>
+          <a:effectRef idx="0">
+            <a:scrgbClr r="0" g="0" b="0"/>
+          </a:effectRef>
+          <a:fontRef idx="none"/>
+        </p:style>
+        <p:txBody>
+          <a:bodyPr rot="0" spcFirstLastPara="1" vertOverflow="overflow" horzOverflow="overflow" vert="horz" wrap="square" lIns="50800" tIns="50800" rIns="50800" bIns="50800" numCol="1" spcCol="38100" rtlCol="0" anchor="ctr">
+            <a:spAutoFit/>
+          </a:bodyPr>
+          <a:lstStyle/>
+          <a:p>
+            <a:pPr marL="0" marR="0" indent="0" algn="ctr" defTabSz="825500" rtl="0" fontAlgn="auto" latinLnBrk="0" hangingPunct="0">
+              <a:lnSpc>
+                <a:spcPct val="100000"/>
+              </a:lnSpc>
+              <a:spcBef>
+                <a:spcPts val="0"/>
+              </a:spcBef>
+              <a:spcAft>
+                <a:spcPts val="0"/>
+              </a:spcAft>
+              <a:buClrTx/>
+              <a:buSzTx/>
+              <a:buFontTx/>
               <a:buNone/>
+              <a:tabLst/>
             </a:pPr>
-            <a:endParaRPr dirty="0"/>
+            <a:endParaRPr kumimoji="0" lang="zh-TW" altLang="en-US" sz="3200" b="0" i="0" u="none" strike="noStrike" cap="none" spc="0" normalizeH="0" baseline="0">
+              <a:ln>
+                <a:noFill/>
+              </a:ln>
+              <a:solidFill>
+                <a:srgbClr val="FFFFFF"/>
+              </a:solidFill>
+              <a:effectLst/>
+              <a:uFillTx/>
+              <a:latin typeface="Helvetica Neue Medium"/>
+              <a:ea typeface="Helvetica Neue Medium"/>
+              <a:cs typeface="Helvetica Neue Medium"/>
+              <a:sym typeface="Helvetica Neue Medium"/>
+            </a:endParaRPr>
           </a:p>
         </p:txBody>
       </p:sp>
@@ -4696,8 +4949,8 @@
         </p:nvSpPr>
         <p:spPr>
           <a:xfrm>
-            <a:off x="9524511" y="4248504"/>
-            <a:ext cx="5334977" cy="8256012"/>
+            <a:off x="8692904" y="6415738"/>
+            <a:ext cx="5334977" cy="1433163"/>
           </a:xfrm>
           <a:prstGeom prst="rect">
             <a:avLst/>
@@ -4707,12 +4960,12 @@
           </a:ln>
           <a:extLst>
             <a:ext uri="{C572A759-6A51-4108-AA02-DFA0A04FC94B}">
-              <ma14:wrappingTextBoxFlag xmlns:ma14="http://schemas.microsoft.com/office/mac/drawingml/2011/main" xmlns:a14="http://schemas.microsoft.com/office/drawing/2010/main" xmlns:m="http://schemas.openxmlformats.org/officeDocument/2006/math" xmlns="" val="1"/>
+              <ma14:wrappingTextBoxFlag xmlns="" xmlns:m="http://schemas.openxmlformats.org/officeDocument/2006/math" xmlns:a14="http://schemas.microsoft.com/office/drawing/2010/main" xmlns:ma14="http://schemas.microsoft.com/office/mac/drawingml/2011/main" val="1"/>
             </a:ext>
           </a:extLst>
         </p:spPr>
         <p:txBody>
-          <a:bodyPr lIns="50800" tIns="50800" rIns="50800" bIns="50800">
+          <a:bodyPr lIns="50800" tIns="50800" rIns="50800" bIns="50800" anchor="ctr">
             <a:normAutofit/>
           </a:bodyPr>
           <a:lstStyle>
@@ -4952,7 +5205,7 @@
             </a:lvl9pPr>
           </a:lstStyle>
           <a:p>
-            <a:pPr marL="0" indent="0" hangingPunct="1">
+            <a:pPr marL="0" indent="0" algn="ctr" hangingPunct="1">
               <a:buFontTx/>
               <a:buNone/>
             </a:pPr>
@@ -4960,13 +5213,6 @@
               <a:rPr lang="en-US" dirty="0"/>
               <a:t>Section properties</a:t>
             </a:r>
-          </a:p>
-          <a:p>
-            <a:pPr marL="0" indent="0" hangingPunct="1">
-              <a:buFontTx/>
-              <a:buNone/>
-            </a:pPr>
-            <a:endParaRPr lang="en-US" dirty="0"/>
           </a:p>
         </p:txBody>
       </p:sp>
@@ -4986,8 +5232,8 @@
         </p:nvSpPr>
         <p:spPr>
           <a:xfrm>
-            <a:off x="17842522" y="4248504"/>
-            <a:ext cx="5720863" cy="8256012"/>
+            <a:off x="16978506" y="8937752"/>
+            <a:ext cx="5720863" cy="1433163"/>
           </a:xfrm>
           <a:prstGeom prst="rect">
             <a:avLst/>
@@ -4997,12 +5243,12 @@
           </a:ln>
           <a:extLst>
             <a:ext uri="{C572A759-6A51-4108-AA02-DFA0A04FC94B}">
-              <ma14:wrappingTextBoxFlag xmlns:ma14="http://schemas.microsoft.com/office/mac/drawingml/2011/main" xmlns:a14="http://schemas.microsoft.com/office/drawing/2010/main" xmlns:m="http://schemas.openxmlformats.org/officeDocument/2006/math" xmlns="" val="1"/>
+              <ma14:wrappingTextBoxFlag xmlns="" xmlns:m="http://schemas.openxmlformats.org/officeDocument/2006/math" xmlns:a14="http://schemas.microsoft.com/office/drawing/2010/main" xmlns:ma14="http://schemas.microsoft.com/office/mac/drawingml/2011/main" val="1"/>
             </a:ext>
           </a:extLst>
         </p:spPr>
         <p:txBody>
-          <a:bodyPr lIns="50800" tIns="50800" rIns="50800" bIns="50800">
+          <a:bodyPr lIns="50800" tIns="50800" rIns="50800" bIns="50800" anchor="ctr">
             <a:normAutofit/>
           </a:bodyPr>
           <a:lstStyle>
@@ -5242,7 +5488,7 @@
             </a:lvl9pPr>
           </a:lstStyle>
           <a:p>
-            <a:pPr marL="0" indent="0" hangingPunct="1">
+            <a:pPr marL="0" indent="0" algn="ctr" hangingPunct="1">
               <a:buFontTx/>
               <a:buNone/>
             </a:pPr>
@@ -5251,12 +5497,175 @@
               <a:t>Analysis parameters</a:t>
             </a:r>
           </a:p>
-          <a:p>
-            <a:pPr marL="0" indent="0" hangingPunct="1">
+        </p:txBody>
+      </p:sp>
+      <p:sp>
+        <p:nvSpPr>
+          <p:cNvPr id="7" name="箭號: 上彎 6">
+            <a:extLst>
+              <a:ext uri="{FF2B5EF4-FFF2-40B4-BE49-F238E27FC236}">
+                <a16:creationId xmlns:a16="http://schemas.microsoft.com/office/drawing/2014/main" id="{EAC46762-C6ED-D812-7D11-9489C7E92361}"/>
+              </a:ext>
+            </a:extLst>
+          </p:cNvPr>
+          <p:cNvSpPr/>
+          <p:nvPr/>
+        </p:nvSpPr>
+        <p:spPr>
+          <a:xfrm rot="5400000">
+            <a:off x="5713020" y="4970822"/>
+            <a:ext cx="2270760" cy="3303122"/>
+          </a:xfrm>
+          <a:prstGeom prst="bentUpArrow">
+            <a:avLst>
+              <a:gd name="adj1" fmla="val 22196"/>
+              <a:gd name="adj2" fmla="val 22664"/>
+              <a:gd name="adj3" fmla="val 35324"/>
+            </a:avLst>
+          </a:prstGeom>
+          <a:solidFill>
+            <a:srgbClr val="000000"/>
+          </a:solidFill>
+          <a:ln w="12700" cap="flat">
+            <a:noFill/>
+            <a:miter lim="400000"/>
+          </a:ln>
+          <a:effectLst/>
+          <a:sp3d/>
+        </p:spPr>
+        <p:style>
+          <a:lnRef idx="0">
+            <a:scrgbClr r="0" g="0" b="0"/>
+          </a:lnRef>
+          <a:fillRef idx="0">
+            <a:scrgbClr r="0" g="0" b="0"/>
+          </a:fillRef>
+          <a:effectRef idx="0">
+            <a:scrgbClr r="0" g="0" b="0"/>
+          </a:effectRef>
+          <a:fontRef idx="none"/>
+        </p:style>
+        <p:txBody>
+          <a:bodyPr rot="0" spcFirstLastPara="1" vertOverflow="overflow" horzOverflow="overflow" vert="horz" wrap="square" lIns="50800" tIns="50800" rIns="50800" bIns="50800" numCol="1" spcCol="38100" rtlCol="0" anchor="ctr">
+            <a:spAutoFit/>
+          </a:bodyPr>
+          <a:lstStyle/>
+          <a:p>
+            <a:pPr marL="0" marR="0" indent="0" algn="ctr" defTabSz="825500" rtl="0" fontAlgn="auto" latinLnBrk="0" hangingPunct="0">
+              <a:lnSpc>
+                <a:spcPct val="100000"/>
+              </a:lnSpc>
+              <a:spcBef>
+                <a:spcPts val="0"/>
+              </a:spcBef>
+              <a:spcAft>
+                <a:spcPts val="0"/>
+              </a:spcAft>
+              <a:buClrTx/>
+              <a:buSzTx/>
               <a:buFontTx/>
               <a:buNone/>
+              <a:tabLst/>
             </a:pPr>
-            <a:endParaRPr lang="en-US" dirty="0"/>
+            <a:endParaRPr kumimoji="0" lang="zh-TW" altLang="en-US" sz="3200" b="0" i="0" u="none" strike="noStrike" cap="none" spc="0" normalizeH="0" baseline="0">
+              <a:ln>
+                <a:noFill/>
+              </a:ln>
+              <a:solidFill>
+                <a:srgbClr val="FFFFFF"/>
+              </a:solidFill>
+              <a:effectLst/>
+              <a:uFillTx/>
+              <a:latin typeface="Helvetica Neue Medium"/>
+              <a:ea typeface="Helvetica Neue Medium"/>
+              <a:cs typeface="Helvetica Neue Medium"/>
+              <a:sym typeface="Helvetica Neue Medium"/>
+            </a:endParaRPr>
+          </a:p>
+        </p:txBody>
+      </p:sp>
+      <p:sp>
+        <p:nvSpPr>
+          <p:cNvPr id="8" name="箭號: 上彎 7">
+            <a:extLst>
+              <a:ext uri="{FF2B5EF4-FFF2-40B4-BE49-F238E27FC236}">
+                <a16:creationId xmlns:a16="http://schemas.microsoft.com/office/drawing/2014/main" id="{B5773A73-C895-0FAD-489C-DD252E75BE74}"/>
+              </a:ext>
+            </a:extLst>
+          </p:cNvPr>
+          <p:cNvSpPr/>
+          <p:nvPr/>
+        </p:nvSpPr>
+        <p:spPr>
+          <a:xfrm rot="5400000">
+            <a:off x="13893773" y="7332721"/>
+            <a:ext cx="2270760" cy="3303122"/>
+          </a:xfrm>
+          <a:prstGeom prst="bentUpArrow">
+            <a:avLst>
+              <a:gd name="adj1" fmla="val 22196"/>
+              <a:gd name="adj2" fmla="val 22664"/>
+              <a:gd name="adj3" fmla="val 35324"/>
+            </a:avLst>
+          </a:prstGeom>
+          <a:solidFill>
+            <a:srgbClr val="000000"/>
+          </a:solidFill>
+          <a:ln w="12700" cap="flat">
+            <a:noFill/>
+            <a:miter lim="400000"/>
+          </a:ln>
+          <a:effectLst/>
+          <a:sp3d/>
+        </p:spPr>
+        <p:style>
+          <a:lnRef idx="0">
+            <a:scrgbClr r="0" g="0" b="0"/>
+          </a:lnRef>
+          <a:fillRef idx="0">
+            <a:scrgbClr r="0" g="0" b="0"/>
+          </a:fillRef>
+          <a:effectRef idx="0">
+            <a:scrgbClr r="0" g="0" b="0"/>
+          </a:effectRef>
+          <a:fontRef idx="none"/>
+        </p:style>
+        <p:txBody>
+          <a:bodyPr rot="0" spcFirstLastPara="1" vertOverflow="overflow" horzOverflow="overflow" vert="horz" wrap="square" lIns="50800" tIns="50800" rIns="50800" bIns="50800" numCol="1" spcCol="38100" rtlCol="0" anchor="ctr">
+            <a:spAutoFit/>
+          </a:bodyPr>
+          <a:lstStyle/>
+          <a:p>
+            <a:pPr marL="0" marR="0" indent="0" algn="ctr" defTabSz="825500" rtl="0" fontAlgn="auto" latinLnBrk="0" hangingPunct="0">
+              <a:lnSpc>
+                <a:spcPct val="100000"/>
+              </a:lnSpc>
+              <a:spcBef>
+                <a:spcPts val="0"/>
+              </a:spcBef>
+              <a:spcAft>
+                <a:spcPts val="0"/>
+              </a:spcAft>
+              <a:buClrTx/>
+              <a:buSzTx/>
+              <a:buFontTx/>
+              <a:buNone/>
+              <a:tabLst/>
+            </a:pPr>
+            <a:endParaRPr kumimoji="0" lang="zh-TW" altLang="en-US" sz="3200" b="0" i="0" u="none" strike="noStrike" cap="none" spc="0" normalizeH="0" baseline="0">
+              <a:ln>
+                <a:noFill/>
+              </a:ln>
+              <a:solidFill>
+                <a:srgbClr val="FFFFFF"/>
+              </a:solidFill>
+              <a:effectLst/>
+              <a:uFillTx/>
+              <a:latin typeface="Helvetica Neue Medium"/>
+              <a:ea typeface="Helvetica Neue Medium"/>
+              <a:cs typeface="Helvetica Neue Medium"/>
+              <a:sym typeface="Helvetica Neue Medium"/>
+            </a:endParaRPr>
           </a:p>
         </p:txBody>
       </p:sp>
@@ -5327,7 +5736,7 @@
           </a:prstGeom>
           <a:extLst>
             <a:ext uri="{C572A759-6A51-4108-AA02-DFA0A04FC94B}">
-              <ma14:wrappingTextBoxFlag xmlns:ma14="http://schemas.microsoft.com/office/mac/drawingml/2011/main" xmlns:a14="http://schemas.microsoft.com/office/drawing/2010/main" xmlns:m="http://schemas.openxmlformats.org/officeDocument/2006/math" xmlns="" val="1"/>
+              <ma14:wrappingTextBoxFlag xmlns="" xmlns:m="http://schemas.openxmlformats.org/officeDocument/2006/math" xmlns:a14="http://schemas.microsoft.com/office/drawing/2010/main" xmlns:ma14="http://schemas.microsoft.com/office/mac/drawingml/2011/main" val="1"/>
             </a:ext>
           </a:extLst>
         </p:spPr>
@@ -5475,7 +5884,7 @@
           </a:prstGeom>
           <a:extLst>
             <a:ext uri="{C572A759-6A51-4108-AA02-DFA0A04FC94B}">
-              <ma14:wrappingTextBoxFlag xmlns:ma14="http://schemas.microsoft.com/office/mac/drawingml/2011/main" xmlns:a14="http://schemas.microsoft.com/office/drawing/2010/main" xmlns:m="http://schemas.openxmlformats.org/officeDocument/2006/math" xmlns="" val="1"/>
+              <ma14:wrappingTextBoxFlag xmlns="" xmlns:m="http://schemas.openxmlformats.org/officeDocument/2006/math" xmlns:a14="http://schemas.microsoft.com/office/drawing/2010/main" xmlns:ma14="http://schemas.microsoft.com/office/mac/drawingml/2011/main" val="1"/>
             </a:ext>
           </a:extLst>
         </p:spPr>
@@ -5493,8 +5902,8 @@
           </a:p>
         </p:txBody>
       </p:sp>
-      <mc:AlternateContent xmlns:mc="http://schemas.openxmlformats.org/markup-compatibility/2006">
-        <mc:Choice xmlns:a14="http://schemas.microsoft.com/office/drawing/2010/main" Requires="a14">
+      <mc:AlternateContent xmlns:mc="http://schemas.openxmlformats.org/markup-compatibility/2006" xmlns:a14="http://schemas.microsoft.com/office/drawing/2010/main">
+        <mc:Choice Requires="a14">
           <p:sp>
             <p:nvSpPr>
               <p:cNvPr id="188" name="Longitudinal bars: #8-D25…"/>
@@ -5514,7 +5923,7 @@
               </a:ln>
               <a:extLst>
                 <a:ext uri="{C572A759-6A51-4108-AA02-DFA0A04FC94B}">
-                  <ma14:wrappingTextBoxFlag xmlns:ma14="http://schemas.microsoft.com/office/mac/drawingml/2011/main" xmlns:m="http://schemas.openxmlformats.org/officeDocument/2006/math" xmlns="" val="1"/>
+                  <ma14:wrappingTextBoxFlag xmlns="" xmlns:m="http://schemas.openxmlformats.org/officeDocument/2006/math" xmlns:ma14="http://schemas.microsoft.com/office/mac/drawingml/2011/main" val="1"/>
                 </a:ext>
               </a:extLst>
             </p:spPr>
@@ -5587,7 +5996,7 @@
             </p:txBody>
           </p:sp>
         </mc:Choice>
-        <mc:Fallback>
+        <mc:Fallback xmlns="">
           <p:sp>
             <p:nvSpPr>
               <p:cNvPr id="188" name="Longitudinal bars: #8-D25…"/>
@@ -5644,15 +6053,15 @@
         </p:nvPicPr>
         <p:blipFill>
           <a:blip r:embed="rId4"/>
-          <a:srcRect t="7000" r="9649"/>
+          <a:srcRect l="17758" t="7000" r="9649" b="23459"/>
           <a:stretch>
             <a:fillRect/>
           </a:stretch>
         </p:blipFill>
         <p:spPr>
           <a:xfrm>
-            <a:off x="-2241134" y="4030997"/>
-            <a:ext cx="15821882" cy="11508397"/>
+            <a:off x="868680" y="4030997"/>
+            <a:ext cx="12712068" cy="8605503"/>
           </a:xfrm>
           <a:prstGeom prst="rect">
             <a:avLst/>
@@ -5729,7 +6138,7 @@
           </a:prstGeom>
           <a:extLst>
             <a:ext uri="{C572A759-6A51-4108-AA02-DFA0A04FC94B}">
-              <ma14:wrappingTextBoxFlag xmlns:ma14="http://schemas.microsoft.com/office/mac/drawingml/2011/main" xmlns:a14="http://schemas.microsoft.com/office/drawing/2010/main" xmlns:m="http://schemas.openxmlformats.org/officeDocument/2006/math" xmlns="" val="1"/>
+              <ma14:wrappingTextBoxFlag xmlns="" xmlns:m="http://schemas.openxmlformats.org/officeDocument/2006/math" xmlns:a14="http://schemas.microsoft.com/office/drawing/2010/main" xmlns:ma14="http://schemas.microsoft.com/office/mac/drawingml/2011/main" val="1"/>
             </a:ext>
           </a:extLst>
         </p:spPr>
@@ -5747,8 +6156,8 @@
           </a:p>
         </p:txBody>
       </p:sp>
-      <mc:AlternateContent xmlns:mc="http://schemas.openxmlformats.org/markup-compatibility/2006">
-        <mc:Choice xmlns:a14="http://schemas.microsoft.com/office/drawing/2010/main" Requires="a14">
+      <mc:AlternateContent xmlns:mc="http://schemas.openxmlformats.org/markup-compatibility/2006" xmlns:a14="http://schemas.microsoft.com/office/drawing/2010/main">
+        <mc:Choice Requires="a14">
           <p:sp>
             <p:nvSpPr>
               <p:cNvPr id="195" name="Normal Concrete (28MPa)…"/>
@@ -5768,7 +6177,7 @@
               </a:ln>
               <a:extLst>
                 <a:ext uri="{C572A759-6A51-4108-AA02-DFA0A04FC94B}">
-                  <ma14:wrappingTextBoxFlag xmlns:ma14="http://schemas.microsoft.com/office/mac/drawingml/2011/main" xmlns:m="http://schemas.openxmlformats.org/officeDocument/2006/math" xmlns="" val="1"/>
+                  <ma14:wrappingTextBoxFlag xmlns="" xmlns:m="http://schemas.openxmlformats.org/officeDocument/2006/math" xmlns:ma14="http://schemas.microsoft.com/office/mac/drawingml/2011/main" val="1"/>
                 </a:ext>
               </a:extLst>
             </p:spPr>
@@ -5817,7 +6226,7 @@
                       <m:sSubSup>
                         <m:sSubSupPr>
                           <m:ctrlPr>
-                            <a:rPr sz="5750">
+                            <a:rPr sz="5750" i="1">
                               <a:solidFill>
                                 <a:srgbClr val="000000"/>
                               </a:solidFill>
@@ -5903,7 +6312,7 @@
                       <m:sSub>
                         <m:sSubPr>
                           <m:ctrlPr>
-                            <a:rPr sz="5750">
+                            <a:rPr sz="5750" i="1">
                               <a:solidFill>
                                 <a:srgbClr val="000000"/>
                               </a:solidFill>
@@ -5975,7 +6384,7 @@
                       <m:sSub>
                         <m:sSubPr>
                           <m:ctrlPr>
-                            <a:rPr sz="5750">
+                            <a:rPr sz="5750" i="1">
                               <a:solidFill>
                                 <a:srgbClr val="000000"/>
                               </a:solidFill>
@@ -6050,7 +6459,7 @@
                       <m:sSub>
                         <m:sSubPr>
                           <m:ctrlPr>
-                            <a:rPr sz="5750">
+                            <a:rPr sz="5750" i="1">
                               <a:solidFill>
                                 <a:srgbClr val="000000"/>
                               </a:solidFill>
@@ -6111,7 +6520,7 @@
             </p:txBody>
           </p:sp>
         </mc:Choice>
-        <mc:Fallback>
+        <mc:Fallback xmlns="">
           <p:sp>
             <p:nvSpPr>
               <p:cNvPr id="195" name="Normal Concrete (28MPa)…"/>
@@ -6252,7 +6661,7 @@
           </a:prstGeom>
           <a:extLst>
             <a:ext uri="{C572A759-6A51-4108-AA02-DFA0A04FC94B}">
-              <ma14:wrappingTextBoxFlag xmlns:ma14="http://schemas.microsoft.com/office/mac/drawingml/2011/main" xmlns:a14="http://schemas.microsoft.com/office/drawing/2010/main" xmlns:m="http://schemas.openxmlformats.org/officeDocument/2006/math" xmlns="" val="1"/>
+              <ma14:wrappingTextBoxFlag xmlns="" xmlns:m="http://schemas.openxmlformats.org/officeDocument/2006/math" xmlns:a14="http://schemas.microsoft.com/office/drawing/2010/main" xmlns:ma14="http://schemas.microsoft.com/office/mac/drawingml/2011/main" val="1"/>
             </a:ext>
           </a:extLst>
         </p:spPr>
@@ -6270,8 +6679,8 @@
           </a:p>
         </p:txBody>
       </p:sp>
-      <mc:AlternateContent xmlns:mc="http://schemas.openxmlformats.org/markup-compatibility/2006">
-        <mc:Choice xmlns:a14="http://schemas.microsoft.com/office/drawing/2010/main" Requires="a14">
+      <mc:AlternateContent xmlns:mc="http://schemas.openxmlformats.org/markup-compatibility/2006" xmlns:a14="http://schemas.microsoft.com/office/drawing/2010/main">
+        <mc:Choice Requires="a14">
           <p:sp>
             <p:nvSpPr>
               <p:cNvPr id="202" name="High Strength Concrete (70MPa)…"/>
@@ -6291,7 +6700,7 @@
               </a:ln>
               <a:extLst>
                 <a:ext uri="{C572A759-6A51-4108-AA02-DFA0A04FC94B}">
-                  <ma14:wrappingTextBoxFlag xmlns:ma14="http://schemas.microsoft.com/office/mac/drawingml/2011/main" xmlns:m="http://schemas.openxmlformats.org/officeDocument/2006/math" xmlns="" val="1"/>
+                  <ma14:wrappingTextBoxFlag xmlns="" xmlns:m="http://schemas.openxmlformats.org/officeDocument/2006/math" xmlns:ma14="http://schemas.microsoft.com/office/mac/drawingml/2011/main" val="1"/>
                 </a:ext>
               </a:extLst>
             </p:spPr>
@@ -6340,7 +6749,7 @@
                       <m:sSubSup>
                         <m:sSubSupPr>
                           <m:ctrlPr>
-                            <a:rPr sz="5750">
+                            <a:rPr sz="5750" i="1">
                               <a:solidFill>
                                 <a:srgbClr val="000000"/>
                               </a:solidFill>
@@ -6426,7 +6835,7 @@
                       <m:sSub>
                         <m:sSubPr>
                           <m:ctrlPr>
-                            <a:rPr sz="5750">
+                            <a:rPr sz="5750" i="1">
                               <a:solidFill>
                                 <a:srgbClr val="000000"/>
                               </a:solidFill>
@@ -6498,7 +6907,7 @@
                       <m:sSub>
                         <m:sSubPr>
                           <m:ctrlPr>
-                            <a:rPr sz="5750">
+                            <a:rPr sz="5750" i="1">
                               <a:solidFill>
                                 <a:srgbClr val="000000"/>
                               </a:solidFill>
@@ -6573,7 +6982,7 @@
                       <m:sSub>
                         <m:sSubPr>
                           <m:ctrlPr>
-                            <a:rPr sz="5750">
+                            <a:rPr sz="5750" i="1">
                               <a:solidFill>
                                 <a:srgbClr val="000000"/>
                               </a:solidFill>
@@ -6634,7 +7043,7 @@
             </p:txBody>
           </p:sp>
         </mc:Choice>
-        <mc:Fallback>
+        <mc:Fallback xmlns="">
           <p:sp>
             <p:nvSpPr>
               <p:cNvPr id="202" name="High Strength Concrete (70MPa)…"/>
@@ -6775,7 +7184,7 @@
           </a:prstGeom>
           <a:extLst>
             <a:ext uri="{C572A759-6A51-4108-AA02-DFA0A04FC94B}">
-              <ma14:wrappingTextBoxFlag xmlns:ma14="http://schemas.microsoft.com/office/mac/drawingml/2011/main" xmlns:a14="http://schemas.microsoft.com/office/drawing/2010/main" xmlns:m="http://schemas.openxmlformats.org/officeDocument/2006/math" xmlns="" val="1"/>
+              <ma14:wrappingTextBoxFlag xmlns="" xmlns:m="http://schemas.openxmlformats.org/officeDocument/2006/math" xmlns:a14="http://schemas.microsoft.com/office/drawing/2010/main" xmlns:ma14="http://schemas.microsoft.com/office/mac/drawingml/2011/main" val="1"/>
             </a:ext>
           </a:extLst>
         </p:spPr>
@@ -6793,8 +7202,8 @@
           </a:p>
         </p:txBody>
       </p:sp>
-      <mc:AlternateContent xmlns:mc="http://schemas.openxmlformats.org/markup-compatibility/2006">
-        <mc:Choice xmlns:a14="http://schemas.microsoft.com/office/drawing/2010/main" Requires="a14">
+      <mc:AlternateContent xmlns:mc="http://schemas.openxmlformats.org/markup-compatibility/2006" xmlns:a14="http://schemas.microsoft.com/office/drawing/2010/main">
+        <mc:Choice Requires="a14">
           <p:sp>
             <p:nvSpPr>
               <p:cNvPr id="207" name="SD420…"/>
@@ -6814,7 +7223,7 @@
               </a:ln>
               <a:extLst>
                 <a:ext uri="{C572A759-6A51-4108-AA02-DFA0A04FC94B}">
-                  <ma14:wrappingTextBoxFlag xmlns:ma14="http://schemas.microsoft.com/office/mac/drawingml/2011/main" xmlns:m="http://schemas.openxmlformats.org/officeDocument/2006/math" xmlns="" val="1"/>
+                  <ma14:wrappingTextBoxFlag xmlns="" xmlns:m="http://schemas.openxmlformats.org/officeDocument/2006/math" xmlns:ma14="http://schemas.microsoft.com/office/mac/drawingml/2011/main" val="1"/>
                 </a:ext>
               </a:extLst>
             </p:spPr>
@@ -6863,7 +7272,7 @@
                       <m:sSub>
                         <m:sSubPr>
                           <m:ctrlPr>
-                            <a:rPr sz="5750">
+                            <a:rPr sz="5750" i="1">
                               <a:solidFill>
                                 <a:srgbClr val="000000"/>
                               </a:solidFill>
@@ -6938,7 +7347,7 @@
                       <m:sSub>
                         <m:sSubPr>
                           <m:ctrlPr>
-                            <a:rPr sz="5750">
+                            <a:rPr sz="5750" i="1">
                               <a:solidFill>
                                 <a:srgbClr val="000000"/>
                               </a:solidFill>
@@ -7013,7 +7422,7 @@
                       <m:sSub>
                         <m:sSubPr>
                           <m:ctrlPr>
-                            <a:rPr sz="5750">
+                            <a:rPr sz="5750" i="1">
                               <a:solidFill>
                                 <a:srgbClr val="000000"/>
                               </a:solidFill>
@@ -7086,7 +7495,7 @@
             </p:txBody>
           </p:sp>
         </mc:Choice>
-        <mc:Fallback>
+        <mc:Fallback xmlns="">
           <p:sp>
             <p:nvSpPr>
               <p:cNvPr id="207" name="SD420…"/>
@@ -7227,7 +7636,7 @@
           </a:prstGeom>
           <a:extLst>
             <a:ext uri="{C572A759-6A51-4108-AA02-DFA0A04FC94B}">
-              <ma14:wrappingTextBoxFlag xmlns:ma14="http://schemas.microsoft.com/office/mac/drawingml/2011/main" xmlns:a14="http://schemas.microsoft.com/office/drawing/2010/main" xmlns:m="http://schemas.openxmlformats.org/officeDocument/2006/math" xmlns="" val="1"/>
+              <ma14:wrappingTextBoxFlag xmlns="" xmlns:m="http://schemas.openxmlformats.org/officeDocument/2006/math" xmlns:a14="http://schemas.microsoft.com/office/drawing/2010/main" xmlns:ma14="http://schemas.microsoft.com/office/mac/drawingml/2011/main" val="1"/>
             </a:ext>
           </a:extLst>
         </p:spPr>
@@ -7245,8 +7654,8 @@
           </a:p>
         </p:txBody>
       </p:sp>
-      <mc:AlternateContent xmlns:mc="http://schemas.openxmlformats.org/markup-compatibility/2006">
-        <mc:Choice xmlns:a14="http://schemas.microsoft.com/office/drawing/2010/main" Requires="a14">
+      <mc:AlternateContent xmlns:mc="http://schemas.openxmlformats.org/markup-compatibility/2006" xmlns:a14="http://schemas.microsoft.com/office/drawing/2010/main">
+        <mc:Choice Requires="a14">
           <p:sp>
             <p:nvSpPr>
               <p:cNvPr id="212" name="SD550…"/>
@@ -7266,7 +7675,7 @@
               </a:ln>
               <a:extLst>
                 <a:ext uri="{C572A759-6A51-4108-AA02-DFA0A04FC94B}">
-                  <ma14:wrappingTextBoxFlag xmlns:ma14="http://schemas.microsoft.com/office/mac/drawingml/2011/main" xmlns:m="http://schemas.openxmlformats.org/officeDocument/2006/math" xmlns="" val="1"/>
+                  <ma14:wrappingTextBoxFlag xmlns="" xmlns:m="http://schemas.openxmlformats.org/officeDocument/2006/math" xmlns:ma14="http://schemas.microsoft.com/office/mac/drawingml/2011/main" val="1"/>
                 </a:ext>
               </a:extLst>
             </p:spPr>
@@ -7315,7 +7724,7 @@
                       <m:sSub>
                         <m:sSubPr>
                           <m:ctrlPr>
-                            <a:rPr sz="5750">
+                            <a:rPr sz="5750" i="1">
                               <a:solidFill>
                                 <a:srgbClr val="000000"/>
                               </a:solidFill>
@@ -7390,7 +7799,7 @@
                       <m:sSub>
                         <m:sSubPr>
                           <m:ctrlPr>
-                            <a:rPr sz="5750">
+                            <a:rPr sz="5750" i="1">
                               <a:solidFill>
                                 <a:srgbClr val="000000"/>
                               </a:solidFill>
@@ -7465,7 +7874,7 @@
                       <m:sSub>
                         <m:sSubPr>
                           <m:ctrlPr>
-                            <a:rPr sz="5750">
+                            <a:rPr sz="5750" i="1">
                               <a:solidFill>
                                 <a:srgbClr val="000000"/>
                               </a:solidFill>
@@ -7538,7 +7947,7 @@
             </p:txBody>
           </p:sp>
         </mc:Choice>
-        <mc:Fallback>
+        <mc:Fallback xmlns="">
           <p:sp>
             <p:nvSpPr>
               <p:cNvPr id="212" name="SD550…"/>
@@ -7679,7 +8088,7 @@
           </a:prstGeom>
           <a:extLst>
             <a:ext uri="{C572A759-6A51-4108-AA02-DFA0A04FC94B}">
-              <ma14:wrappingTextBoxFlag xmlns:ma14="http://schemas.microsoft.com/office/mac/drawingml/2011/main" xmlns:a14="http://schemas.microsoft.com/office/drawing/2010/main" xmlns:m="http://schemas.openxmlformats.org/officeDocument/2006/math" xmlns="" val="1"/>
+              <ma14:wrappingTextBoxFlag xmlns="" xmlns:m="http://schemas.openxmlformats.org/officeDocument/2006/math" xmlns:a14="http://schemas.microsoft.com/office/drawing/2010/main" xmlns:ma14="http://schemas.microsoft.com/office/mac/drawingml/2011/main" val="1"/>
             </a:ext>
           </a:extLst>
         </p:spPr>
@@ -7744,7 +8153,7 @@
           </a:ln>
           <a:extLst>
             <a:ext uri="{C572A759-6A51-4108-AA02-DFA0A04FC94B}">
-              <ma14:wrappingTextBoxFlag xmlns:ma14="http://schemas.microsoft.com/office/mac/drawingml/2011/main" xmlns:a14="http://schemas.microsoft.com/office/drawing/2010/main" xmlns:m="http://schemas.openxmlformats.org/officeDocument/2006/math" xmlns="" val="1"/>
+              <ma14:wrappingTextBoxFlag xmlns="" xmlns:m="http://schemas.openxmlformats.org/officeDocument/2006/math" xmlns:a14="http://schemas.microsoft.com/office/drawing/2010/main" xmlns:ma14="http://schemas.microsoft.com/office/mac/drawingml/2011/main" val="1"/>
             </a:ext>
           </a:extLst>
         </p:spPr>

--- a/HW1/Report1.pptx
+++ b/HW1/Report1.pptx
@@ -528,6 +528,72 @@
       </p:grpSpPr>
       <p:sp>
         <p:nvSpPr>
+          <p:cNvPr id="2" name="投影片影像版面配置區 1"/>
+          <p:cNvSpPr>
+            <a:spLocks noGrp="1" noRot="1" noChangeAspect="1"/>
+          </p:cNvSpPr>
+          <p:nvPr>
+            <p:ph type="sldImg"/>
+          </p:nvPr>
+        </p:nvSpPr>
+        <p:spPr>
+          <a:xfrm>
+            <a:off x="381000" y="685800"/>
+            <a:ext cx="6096000" cy="3429000"/>
+          </a:xfrm>
+        </p:spPr>
+      </p:sp>
+      <p:sp>
+        <p:nvSpPr>
+          <p:cNvPr id="3" name="備忘稿版面配置區 2"/>
+          <p:cNvSpPr>
+            <a:spLocks noGrp="1"/>
+          </p:cNvSpPr>
+          <p:nvPr>
+            <p:ph type="body" idx="1"/>
+          </p:nvPr>
+        </p:nvSpPr>
+        <p:spPr/>
+        <p:txBody>
+          <a:bodyPr/>
+          <a:lstStyle/>
+          <a:p>
+            <a:endParaRPr lang="zh-TW" altLang="en-US" dirty="0"/>
+          </a:p>
+        </p:txBody>
+      </p:sp>
+    </p:spTree>
+    <p:extLst>
+      <p:ext uri="{BB962C8B-B14F-4D97-AF65-F5344CB8AC3E}">
+        <p14:creationId xmlns:p14="http://schemas.microsoft.com/office/powerpoint/2010/main" val="2342282095"/>
+      </p:ext>
+    </p:extLst>
+  </p:cSld>
+  <p:clrMapOvr>
+    <a:masterClrMapping/>
+  </p:clrMapOvr>
+</p:notes>
+</file>
+
+<file path=ppt/notesSlides/notesSlide2.xml><?xml version="1.0" encoding="utf-8"?>
+<p:notes xmlns:a="http://schemas.openxmlformats.org/drawingml/2006/main" xmlns:r="http://schemas.openxmlformats.org/officeDocument/2006/relationships" xmlns:p="http://schemas.openxmlformats.org/presentationml/2006/main">
+  <p:cSld>
+    <p:spTree>
+      <p:nvGrpSpPr>
+        <p:cNvPr id="1" name=""/>
+        <p:cNvGrpSpPr/>
+        <p:nvPr/>
+      </p:nvGrpSpPr>
+      <p:grpSpPr>
+        <a:xfrm>
+          <a:off x="0" y="0"/>
+          <a:ext cx="0" cy="0"/>
+          <a:chOff x="0" y="0"/>
+          <a:chExt cx="0" cy="0"/>
+        </a:xfrm>
+      </p:grpSpPr>
+      <p:sp>
+        <p:nvSpPr>
           <p:cNvPr id="183" name="Shape 183"/>
           <p:cNvSpPr>
             <a:spLocks noGrp="1" noRot="1" noChangeAspect="1"/>
@@ -586,7 +652,7 @@
 </p:notes>
 </file>
 
-<file path=ppt/notesSlides/notesSlide2.xml><?xml version="1.0" encoding="utf-8"?>
+<file path=ppt/notesSlides/notesSlide3.xml><?xml version="1.0" encoding="utf-8"?>
 <p:notes xmlns:a="http://schemas.openxmlformats.org/drawingml/2006/main" xmlns:r="http://schemas.openxmlformats.org/officeDocument/2006/relationships" xmlns:p="http://schemas.openxmlformats.org/presentationml/2006/main">
   <p:cSld>
     <p:spTree>
@@ -695,7 +761,7 @@
 </p:notes>
 </file>
 
-<file path=ppt/notesSlides/notesSlide3.xml><?xml version="1.0" encoding="utf-8"?>
+<file path=ppt/notesSlides/notesSlide4.xml><?xml version="1.0" encoding="utf-8"?>
 <p:notes xmlns:a="http://schemas.openxmlformats.org/drawingml/2006/main" xmlns:r="http://schemas.openxmlformats.org/officeDocument/2006/relationships" xmlns:p="http://schemas.openxmlformats.org/presentationml/2006/main">
   <p:cSld>
     <p:spTree>
@@ -3587,7 +3653,7 @@
           </a:ln>
           <a:extLst>
             <a:ext uri="{C572A759-6A51-4108-AA02-DFA0A04FC94B}">
-              <ma14:wrappingTextBoxFlag xmlns="" xmlns:m="http://schemas.openxmlformats.org/officeDocument/2006/math" xmlns:a14="http://schemas.microsoft.com/office/drawing/2010/main" xmlns:ma14="http://schemas.microsoft.com/office/mac/drawingml/2011/main" val="1"/>
+              <ma14:wrappingTextBoxFlag xmlns:ma14="http://schemas.microsoft.com/office/mac/drawingml/2011/main" xmlns:a14="http://schemas.microsoft.com/office/drawing/2010/main" xmlns:m="http://schemas.openxmlformats.org/officeDocument/2006/math" xmlns="" val="1"/>
             </a:ext>
           </a:extLst>
         </p:spPr>
@@ -3626,7 +3692,7 @@
           </a:ln>
           <a:extLst>
             <a:ext uri="{C572A759-6A51-4108-AA02-DFA0A04FC94B}">
-              <ma14:wrappingTextBoxFlag xmlns="" xmlns:m="http://schemas.openxmlformats.org/officeDocument/2006/math" xmlns:a14="http://schemas.microsoft.com/office/drawing/2010/main" xmlns:ma14="http://schemas.microsoft.com/office/mac/drawingml/2011/main" val="1"/>
+              <ma14:wrappingTextBoxFlag xmlns:ma14="http://schemas.microsoft.com/office/mac/drawingml/2011/main" xmlns:a14="http://schemas.microsoft.com/office/drawing/2010/main" xmlns:m="http://schemas.openxmlformats.org/officeDocument/2006/math" xmlns="" val="1"/>
             </a:ext>
           </a:extLst>
         </p:spPr>
@@ -4472,7 +4538,7 @@
           </a:prstGeom>
           <a:extLst>
             <a:ext uri="{C572A759-6A51-4108-AA02-DFA0A04FC94B}">
-              <ma14:wrappingTextBoxFlag xmlns="" xmlns:m="http://schemas.openxmlformats.org/officeDocument/2006/math" xmlns:a14="http://schemas.microsoft.com/office/drawing/2010/main" xmlns:ma14="http://schemas.microsoft.com/office/mac/drawingml/2011/main" val="1"/>
+              <ma14:wrappingTextBoxFlag xmlns:ma14="http://schemas.microsoft.com/office/mac/drawingml/2011/main" xmlns:a14="http://schemas.microsoft.com/office/drawing/2010/main" xmlns:m="http://schemas.openxmlformats.org/officeDocument/2006/math" xmlns="" val="1"/>
             </a:ext>
           </a:extLst>
         </p:spPr>
@@ -4640,7 +4706,7 @@
         </p:nvSpPr>
         <p:spPr>
           <a:xfrm>
-            <a:off x="16680714" y="8937751"/>
+            <a:off x="15942848" y="8937751"/>
             <a:ext cx="6316446" cy="1433163"/>
           </a:xfrm>
           <a:prstGeom prst="roundRect">
@@ -4960,7 +5026,7 @@
           </a:ln>
           <a:extLst>
             <a:ext uri="{C572A759-6A51-4108-AA02-DFA0A04FC94B}">
-              <ma14:wrappingTextBoxFlag xmlns="" xmlns:m="http://schemas.openxmlformats.org/officeDocument/2006/math" xmlns:a14="http://schemas.microsoft.com/office/drawing/2010/main" xmlns:ma14="http://schemas.microsoft.com/office/mac/drawingml/2011/main" val="1"/>
+              <ma14:wrappingTextBoxFlag xmlns:ma14="http://schemas.microsoft.com/office/mac/drawingml/2011/main" xmlns:a14="http://schemas.microsoft.com/office/drawing/2010/main" xmlns:m="http://schemas.openxmlformats.org/officeDocument/2006/math" xmlns="" val="1"/>
             </a:ext>
           </a:extLst>
         </p:spPr>
@@ -5232,7 +5298,7 @@
         </p:nvSpPr>
         <p:spPr>
           <a:xfrm>
-            <a:off x="16978506" y="8937752"/>
+            <a:off x="16240640" y="8937752"/>
             <a:ext cx="5720863" cy="1433163"/>
           </a:xfrm>
           <a:prstGeom prst="rect">
@@ -5243,7 +5309,7 @@
           </a:ln>
           <a:extLst>
             <a:ext uri="{C572A759-6A51-4108-AA02-DFA0A04FC94B}">
-              <ma14:wrappingTextBoxFlag xmlns="" xmlns:m="http://schemas.openxmlformats.org/officeDocument/2006/math" xmlns:a14="http://schemas.microsoft.com/office/drawing/2010/main" xmlns:ma14="http://schemas.microsoft.com/office/mac/drawingml/2011/main" val="1"/>
+              <ma14:wrappingTextBoxFlag xmlns:ma14="http://schemas.microsoft.com/office/mac/drawingml/2011/main" xmlns:a14="http://schemas.microsoft.com/office/drawing/2010/main" xmlns:m="http://schemas.openxmlformats.org/officeDocument/2006/math" xmlns="" val="1"/>
             </a:ext>
           </a:extLst>
         </p:spPr>
@@ -5513,8 +5579,8 @@
         </p:nvSpPr>
         <p:spPr>
           <a:xfrm rot="5400000">
-            <a:off x="5713020" y="4970822"/>
-            <a:ext cx="2270760" cy="3303122"/>
+            <a:off x="4937221" y="4195023"/>
+            <a:ext cx="2270761" cy="4854718"/>
           </a:xfrm>
           <a:prstGeom prst="bentUpArrow">
             <a:avLst>
@@ -5586,10 +5652,10 @@
       </p:sp>
       <p:sp>
         <p:nvSpPr>
-          <p:cNvPr id="8" name="箭號: 上彎 7">
+          <p:cNvPr id="9" name="箭號: 上彎 8">
             <a:extLst>
               <a:ext uri="{FF2B5EF4-FFF2-40B4-BE49-F238E27FC236}">
-                <a16:creationId xmlns:a16="http://schemas.microsoft.com/office/drawing/2014/main" id="{B5773A73-C895-0FAD-489C-DD252E75BE74}"/>
+                <a16:creationId xmlns:a16="http://schemas.microsoft.com/office/drawing/2014/main" id="{EAD08EB4-E997-2BFF-9902-D2ACB4462E9C}"/>
               </a:ext>
             </a:extLst>
           </p:cNvPr>
@@ -5598,8 +5664,8 @@
         </p:nvSpPr>
         <p:spPr>
           <a:xfrm rot="5400000">
-            <a:off x="13893773" y="7332721"/>
-            <a:ext cx="2270760" cy="3303122"/>
+            <a:off x="12380108" y="6556923"/>
+            <a:ext cx="2270761" cy="4854718"/>
           </a:xfrm>
           <a:prstGeom prst="bentUpArrow">
             <a:avLst>
@@ -5736,7 +5802,7 @@
           </a:prstGeom>
           <a:extLst>
             <a:ext uri="{C572A759-6A51-4108-AA02-DFA0A04FC94B}">
-              <ma14:wrappingTextBoxFlag xmlns="" xmlns:m="http://schemas.openxmlformats.org/officeDocument/2006/math" xmlns:a14="http://schemas.microsoft.com/office/drawing/2010/main" xmlns:ma14="http://schemas.microsoft.com/office/mac/drawingml/2011/main" val="1"/>
+              <ma14:wrappingTextBoxFlag xmlns:ma14="http://schemas.microsoft.com/office/mac/drawingml/2011/main" xmlns:a14="http://schemas.microsoft.com/office/drawing/2010/main" xmlns:m="http://schemas.openxmlformats.org/officeDocument/2006/math" xmlns="" val="1"/>
             </a:ext>
           </a:extLst>
         </p:spPr>
@@ -5879,12 +5945,16 @@
           </p:nvPr>
         </p:nvSpPr>
         <p:spPr>
+          <a:xfrm>
+            <a:off x="1206500" y="2372962"/>
+            <a:ext cx="8242300" cy="934780"/>
+          </a:xfrm>
           <a:prstGeom prst="rect">
             <a:avLst/>
           </a:prstGeom>
           <a:extLst>
             <a:ext uri="{C572A759-6A51-4108-AA02-DFA0A04FC94B}">
-              <ma14:wrappingTextBoxFlag xmlns="" xmlns:m="http://schemas.openxmlformats.org/officeDocument/2006/math" xmlns:a14="http://schemas.microsoft.com/office/drawing/2010/main" xmlns:ma14="http://schemas.microsoft.com/office/mac/drawingml/2011/main" val="1"/>
+              <ma14:wrappingTextBoxFlag xmlns:ma14="http://schemas.microsoft.com/office/mac/drawingml/2011/main" xmlns:a14="http://schemas.microsoft.com/office/drawing/2010/main" xmlns:m="http://schemas.openxmlformats.org/officeDocument/2006/math" xmlns="" val="1"/>
             </a:ext>
           </a:extLst>
         </p:spPr>
@@ -5897,6 +5967,7 @@
           </a:lstStyle>
           <a:p>
             <a:r>
+              <a:rPr dirty="0"/>
               <a:t>Section, parameters</a:t>
             </a:r>
           </a:p>
@@ -5912,7 +5983,7 @@
             </p:nvSpPr>
             <p:spPr>
               <a:xfrm>
-                <a:off x="14917768" y="2586252"/>
+                <a:off x="14153990" y="2566464"/>
                 <a:ext cx="9023510" cy="10396864"/>
               </a:xfrm>
               <a:prstGeom prst="rect">
@@ -5923,31 +5994,43 @@
               </a:ln>
               <a:extLst>
                 <a:ext uri="{C572A759-6A51-4108-AA02-DFA0A04FC94B}">
-                  <ma14:wrappingTextBoxFlag xmlns="" xmlns:m="http://schemas.openxmlformats.org/officeDocument/2006/math" xmlns:ma14="http://schemas.microsoft.com/office/mac/drawingml/2011/main" val="1"/>
+                  <ma14:wrappingTextBoxFlag xmlns:ma14="http://schemas.microsoft.com/office/mac/drawingml/2011/main" xmlns:m="http://schemas.openxmlformats.org/officeDocument/2006/math" xmlns="" val="1"/>
                 </a:ext>
               </a:extLst>
             </p:spPr>
             <p:txBody>
-              <a:bodyPr lIns="50800" tIns="50800" rIns="50800" bIns="50800" anchor="ctr"/>
+              <a:bodyPr lIns="50800" tIns="50800" rIns="50800" bIns="50800" anchor="t"/>
               <a:lstStyle/>
               <a:p>
                 <a:r>
+                  <a:rPr lang="en-US" dirty="0"/>
                   <a:t>Longitudinal bars: #8-D25</a:t>
                 </a:r>
               </a:p>
               <a:p>
                 <a:r>
+                  <a:rPr lang="en-US" altLang="zh-TW" dirty="0"/>
+                  <a:t>Reinforcing Ratio: 2.25%</a:t>
+                </a:r>
+              </a:p>
+              <a:p>
+                <a:endParaRPr lang="en-US" dirty="0"/>
+              </a:p>
+              <a:p>
+                <a:r>
+                  <a:rPr lang="en-US" dirty="0"/>
                   <a:t>Transverse bars: #4-D19</a:t>
                 </a:r>
               </a:p>
               <a:p>
                 <a:r>
+                  <a:rPr lang="en-US" dirty="0"/>
                   <a:t>Section Area: 60*60 </a:t>
                 </a:r>
                 <a14:m>
                   <m:oMath xmlns:m="http://schemas.openxmlformats.org/officeDocument/2006/math">
                     <m:r>
-                      <a:rPr sz="5750" i="1">
+                      <a:rPr lang="en-US" sz="5750" i="1">
                         <a:solidFill>
                           <a:srgbClr val="000000"/>
                         </a:solidFill>
@@ -5958,7 +6041,7 @@
                     <m:sSup>
                       <m:sSupPr>
                         <m:ctrlPr>
-                          <a:rPr sz="5750" i="1">
+                          <a:rPr lang="ar-AE" sz="5750" i="1">
                             <a:solidFill>
                               <a:srgbClr val="000000"/>
                             </a:solidFill>
@@ -5968,7 +6051,7 @@
                       </m:sSupPr>
                       <m:e>
                         <m:r>
-                          <a:rPr sz="5750" i="1">
+                          <a:rPr lang="ar-AE" sz="5750" i="1">
                             <a:solidFill>
                               <a:srgbClr val="000000"/>
                             </a:solidFill>
@@ -5979,7 +6062,7 @@
                       </m:e>
                       <m:sup>
                         <m:r>
-                          <a:rPr sz="5750" i="1">
+                          <a:rPr lang="ar-AE" sz="5750" i="1">
                             <a:solidFill>
                               <a:srgbClr val="000000"/>
                             </a:solidFill>
@@ -5991,7 +6074,11 @@
                     </m:sSup>
                   </m:oMath>
                 </a14:m>
-                <a:endParaRPr/>
+                <a:endParaRPr lang="ar-AE" sz="5750" dirty="0">
+                  <a:solidFill>
+                    <a:srgbClr val="000000"/>
+                  </a:solidFill>
+                </a:endParaRPr>
               </a:p>
             </p:txBody>
           </p:sp>
@@ -6007,7 +6094,7 @@
             </p:nvSpPr>
             <p:spPr>
               <a:xfrm>
-                <a:off x="14917768" y="2586252"/>
+                <a:off x="14153990" y="2566464"/>
                 <a:ext cx="9023510" cy="10396864"/>
               </a:xfrm>
               <a:prstGeom prst="rect">
@@ -6016,7 +6103,7 @@
               <a:blipFill>
                 <a:blip r:embed="rId3"/>
                 <a:stretch>
-                  <a:fillRect l="-3516"/>
+                  <a:fillRect l="-3514" t="-2052"/>
                 </a:stretch>
               </a:blipFill>
               <a:ln w="12700">
@@ -6024,7 +6111,7 @@
               </a:ln>
               <a:extLst>
                 <a:ext uri="{C572A759-6A51-4108-AA02-DFA0A04FC94B}">
-                  <ma14:wrappingTextBoxFlag xmlns:ma14="http://schemas.microsoft.com/office/mac/drawingml/2011/main" xmlns:a14="http://schemas.microsoft.com/office/drawing/2010/main" xmlns:m="http://schemas.openxmlformats.org/officeDocument/2006/math" xmlns="" val="1"/>
+                  <ma14:wrappingTextBoxFlag xmlns="" xmlns:m="http://schemas.openxmlformats.org/officeDocument/2006/math" xmlns:ma14="http://schemas.microsoft.com/office/mac/drawingml/2011/main" xmlns:a14="http://schemas.microsoft.com/office/drawing/2010/main" val="1"/>
                 </a:ext>
               </a:extLst>
             </p:spPr>
@@ -6138,7 +6225,7 @@
           </a:prstGeom>
           <a:extLst>
             <a:ext uri="{C572A759-6A51-4108-AA02-DFA0A04FC94B}">
-              <ma14:wrappingTextBoxFlag xmlns="" xmlns:m="http://schemas.openxmlformats.org/officeDocument/2006/math" xmlns:a14="http://schemas.microsoft.com/office/drawing/2010/main" xmlns:ma14="http://schemas.microsoft.com/office/mac/drawingml/2011/main" val="1"/>
+              <ma14:wrappingTextBoxFlag xmlns:ma14="http://schemas.microsoft.com/office/mac/drawingml/2011/main" xmlns:a14="http://schemas.microsoft.com/office/drawing/2010/main" xmlns:m="http://schemas.openxmlformats.org/officeDocument/2006/math" xmlns="" val="1"/>
             </a:ext>
           </a:extLst>
         </p:spPr>
@@ -6177,7 +6264,7 @@
               </a:ln>
               <a:extLst>
                 <a:ext uri="{C572A759-6A51-4108-AA02-DFA0A04FC94B}">
-                  <ma14:wrappingTextBoxFlag xmlns="" xmlns:m="http://schemas.openxmlformats.org/officeDocument/2006/math" xmlns:ma14="http://schemas.microsoft.com/office/mac/drawingml/2011/main" val="1"/>
+                  <ma14:wrappingTextBoxFlag xmlns:ma14="http://schemas.microsoft.com/office/mac/drawingml/2011/main" xmlns:m="http://schemas.openxmlformats.org/officeDocument/2006/math" xmlns="" val="1"/>
                 </a:ext>
               </a:extLst>
             </p:spPr>
@@ -6661,7 +6748,7 @@
           </a:prstGeom>
           <a:extLst>
             <a:ext uri="{C572A759-6A51-4108-AA02-DFA0A04FC94B}">
-              <ma14:wrappingTextBoxFlag xmlns="" xmlns:m="http://schemas.openxmlformats.org/officeDocument/2006/math" xmlns:a14="http://schemas.microsoft.com/office/drawing/2010/main" xmlns:ma14="http://schemas.microsoft.com/office/mac/drawingml/2011/main" val="1"/>
+              <ma14:wrappingTextBoxFlag xmlns:ma14="http://schemas.microsoft.com/office/mac/drawingml/2011/main" xmlns:a14="http://schemas.microsoft.com/office/drawing/2010/main" xmlns:m="http://schemas.openxmlformats.org/officeDocument/2006/math" xmlns="" val="1"/>
             </a:ext>
           </a:extLst>
         </p:spPr>
@@ -6700,7 +6787,7 @@
               </a:ln>
               <a:extLst>
                 <a:ext uri="{C572A759-6A51-4108-AA02-DFA0A04FC94B}">
-                  <ma14:wrappingTextBoxFlag xmlns="" xmlns:m="http://schemas.openxmlformats.org/officeDocument/2006/math" xmlns:ma14="http://schemas.microsoft.com/office/mac/drawingml/2011/main" val="1"/>
+                  <ma14:wrappingTextBoxFlag xmlns:ma14="http://schemas.microsoft.com/office/mac/drawingml/2011/main" xmlns:m="http://schemas.openxmlformats.org/officeDocument/2006/math" xmlns="" val="1"/>
                 </a:ext>
               </a:extLst>
             </p:spPr>
@@ -7184,7 +7271,7 @@
           </a:prstGeom>
           <a:extLst>
             <a:ext uri="{C572A759-6A51-4108-AA02-DFA0A04FC94B}">
-              <ma14:wrappingTextBoxFlag xmlns="" xmlns:m="http://schemas.openxmlformats.org/officeDocument/2006/math" xmlns:a14="http://schemas.microsoft.com/office/drawing/2010/main" xmlns:ma14="http://schemas.microsoft.com/office/mac/drawingml/2011/main" val="1"/>
+              <ma14:wrappingTextBoxFlag xmlns:ma14="http://schemas.microsoft.com/office/mac/drawingml/2011/main" xmlns:a14="http://schemas.microsoft.com/office/drawing/2010/main" xmlns:m="http://schemas.openxmlformats.org/officeDocument/2006/math" xmlns="" val="1"/>
             </a:ext>
           </a:extLst>
         </p:spPr>
@@ -7223,7 +7310,7 @@
               </a:ln>
               <a:extLst>
                 <a:ext uri="{C572A759-6A51-4108-AA02-DFA0A04FC94B}">
-                  <ma14:wrappingTextBoxFlag xmlns="" xmlns:m="http://schemas.openxmlformats.org/officeDocument/2006/math" xmlns:ma14="http://schemas.microsoft.com/office/mac/drawingml/2011/main" val="1"/>
+                  <ma14:wrappingTextBoxFlag xmlns:ma14="http://schemas.microsoft.com/office/mac/drawingml/2011/main" xmlns:m="http://schemas.openxmlformats.org/officeDocument/2006/math" xmlns="" val="1"/>
                 </a:ext>
               </a:extLst>
             </p:spPr>
@@ -7636,7 +7723,7 @@
           </a:prstGeom>
           <a:extLst>
             <a:ext uri="{C572A759-6A51-4108-AA02-DFA0A04FC94B}">
-              <ma14:wrappingTextBoxFlag xmlns="" xmlns:m="http://schemas.openxmlformats.org/officeDocument/2006/math" xmlns:a14="http://schemas.microsoft.com/office/drawing/2010/main" xmlns:ma14="http://schemas.microsoft.com/office/mac/drawingml/2011/main" val="1"/>
+              <ma14:wrappingTextBoxFlag xmlns:ma14="http://schemas.microsoft.com/office/mac/drawingml/2011/main" xmlns:a14="http://schemas.microsoft.com/office/drawing/2010/main" xmlns:m="http://schemas.openxmlformats.org/officeDocument/2006/math" xmlns="" val="1"/>
             </a:ext>
           </a:extLst>
         </p:spPr>
@@ -7675,7 +7762,7 @@
               </a:ln>
               <a:extLst>
                 <a:ext uri="{C572A759-6A51-4108-AA02-DFA0A04FC94B}">
-                  <ma14:wrappingTextBoxFlag xmlns="" xmlns:m="http://schemas.openxmlformats.org/officeDocument/2006/math" xmlns:ma14="http://schemas.microsoft.com/office/mac/drawingml/2011/main" val="1"/>
+                  <ma14:wrappingTextBoxFlag xmlns:ma14="http://schemas.microsoft.com/office/mac/drawingml/2011/main" xmlns:m="http://schemas.openxmlformats.org/officeDocument/2006/math" xmlns="" val="1"/>
                 </a:ext>
               </a:extLst>
             </p:spPr>
@@ -8088,7 +8175,7 @@
           </a:prstGeom>
           <a:extLst>
             <a:ext uri="{C572A759-6A51-4108-AA02-DFA0A04FC94B}">
-              <ma14:wrappingTextBoxFlag xmlns="" xmlns:m="http://schemas.openxmlformats.org/officeDocument/2006/math" xmlns:a14="http://schemas.microsoft.com/office/drawing/2010/main" xmlns:ma14="http://schemas.microsoft.com/office/mac/drawingml/2011/main" val="1"/>
+              <ma14:wrappingTextBoxFlag xmlns:ma14="http://schemas.microsoft.com/office/mac/drawingml/2011/main" xmlns:a14="http://schemas.microsoft.com/office/drawing/2010/main" xmlns:m="http://schemas.openxmlformats.org/officeDocument/2006/math" xmlns="" val="1"/>
             </a:ext>
           </a:extLst>
         </p:spPr>
@@ -8153,7 +8240,7 @@
           </a:ln>
           <a:extLst>
             <a:ext uri="{C572A759-6A51-4108-AA02-DFA0A04FC94B}">
-              <ma14:wrappingTextBoxFlag xmlns="" xmlns:m="http://schemas.openxmlformats.org/officeDocument/2006/math" xmlns:a14="http://schemas.microsoft.com/office/drawing/2010/main" xmlns:ma14="http://schemas.microsoft.com/office/mac/drawingml/2011/main" val="1"/>
+              <ma14:wrappingTextBoxFlag xmlns:ma14="http://schemas.microsoft.com/office/mac/drawingml/2011/main" xmlns:a14="http://schemas.microsoft.com/office/drawing/2010/main" xmlns:m="http://schemas.openxmlformats.org/officeDocument/2006/math" xmlns="" val="1"/>
             </a:ext>
           </a:extLst>
         </p:spPr>
